--- a/ppt/uge39Loops.pptx
+++ b/ppt/uge39Loops.pptx
@@ -19576,12 +19576,9 @@
 </file>
 
 <file path=customXml/item1.xml><?xml version="1.0" encoding="utf-8"?>
-<?mso-contentType ?>
-<FormTemplates xmlns="http://schemas.microsoft.com/sharepoint/v3/contenttype/forms">
-  <Display>DocumentLibraryForm</Display>
-  <Edit>DocumentLibraryForm</Edit>
-  <New>DocumentLibraryForm</New>
-</FormTemplates>
+<p:properties xmlns:p="http://schemas.microsoft.com/office/2006/metadata/properties" xmlns:xsi="http://www.w3.org/2001/XMLSchema-instance" xmlns:pc="http://schemas.microsoft.com/office/infopath/2007/PartnerControls">
+  <documentManagement/>
+</p:properties>
 </file>
 
 <file path=customXml/item2.xml><?xml version="1.0" encoding="utf-8"?>
@@ -19723,15 +19720,19 @@
 </file>
 
 <file path=customXml/item3.xml><?xml version="1.0" encoding="utf-8"?>
-<p:properties xmlns:p="http://schemas.microsoft.com/office/2006/metadata/properties" xmlns:xsi="http://www.w3.org/2001/XMLSchema-instance" xmlns:pc="http://schemas.microsoft.com/office/infopath/2007/PartnerControls">
-  <documentManagement/>
-</p:properties>
+<?mso-contentType ?>
+<FormTemplates xmlns="http://schemas.microsoft.com/sharepoint/v3/contenttype/forms">
+  <Display>DocumentLibraryForm</Display>
+  <Edit>DocumentLibraryForm</Edit>
+  <New>DocumentLibraryForm</New>
+</FormTemplates>
 </file>
 
 <file path=customXml/itemProps1.xml><?xml version="1.0" encoding="utf-8"?>
-<ds:datastoreItem xmlns:ds="http://schemas.openxmlformats.org/officeDocument/2006/customXml" ds:itemID="{77646C84-701A-4061-B977-6AA8F23187E4}">
+<ds:datastoreItem xmlns:ds="http://schemas.openxmlformats.org/officeDocument/2006/customXml" ds:itemID="{551C73E0-21DE-44C0-AC09-20B6FA27554C}">
   <ds:schemaRefs>
-    <ds:schemaRef ds:uri="http://schemas.microsoft.com/sharepoint/v3/contenttype/forms"/>
+    <ds:schemaRef ds:uri="http://schemas.microsoft.com/office/2006/metadata/properties"/>
+    <ds:schemaRef ds:uri="http://schemas.microsoft.com/office/infopath/2007/PartnerControls"/>
   </ds:schemaRefs>
 </ds:datastoreItem>
 </file>
@@ -19755,10 +19756,9 @@
 </file>
 
 <file path=customXml/itemProps3.xml><?xml version="1.0" encoding="utf-8"?>
-<ds:datastoreItem xmlns:ds="http://schemas.openxmlformats.org/officeDocument/2006/customXml" ds:itemID="{551C73E0-21DE-44C0-AC09-20B6FA27554C}">
+<ds:datastoreItem xmlns:ds="http://schemas.openxmlformats.org/officeDocument/2006/customXml" ds:itemID="{77646C84-701A-4061-B977-6AA8F23187E4}">
   <ds:schemaRefs>
-    <ds:schemaRef ds:uri="http://schemas.microsoft.com/office/2006/metadata/properties"/>
-    <ds:schemaRef ds:uri="http://schemas.microsoft.com/office/infopath/2007/PartnerControls"/>
+    <ds:schemaRef ds:uri="http://schemas.microsoft.com/sharepoint/v3/contenttype/forms"/>
   </ds:schemaRefs>
 </ds:datastoreItem>
 </file>
--- a/ppt/uge39Loops.pptx
+++ b/ppt/uge39Loops.pptx
@@ -4242,7 +4242,7 @@
           <a:p>
             <a:fld id="{1129347E-893C-BE4D-82D7-086F268CE3C9}" type="datetimeFigureOut">
               <a:rPr lang="en-DK" smtClean="0"/>
-              <a:t>17/09/2026</a:t>
+              <a:t>19/09/2026</a:t>
             </a:fld>
             <a:endParaRPr lang="en-DK"/>
           </a:p>
@@ -5476,7 +5476,7 @@
           <a:p>
             <a:fld id="{1D8BD707-D9CF-40AE-B4C6-C98DA3205C09}" type="datetimeFigureOut">
               <a:rPr lang="en-US"/>
-              <a:t>9/17/26</a:t>
+              <a:t>9/19/26</a:t>
             </a:fld>
             <a:endParaRPr lang="en-US"/>
           </a:p>
@@ -5713,7 +5713,7 @@
           <a:p>
             <a:fld id="{1D8BD707-D9CF-40AE-B4C6-C98DA3205C09}" type="datetimeFigureOut">
               <a:rPr lang="en-US"/>
-              <a:t>9/17/26</a:t>
+              <a:t>9/19/26</a:t>
             </a:fld>
             <a:endParaRPr lang="en-US"/>
           </a:p>
@@ -5993,7 +5993,7 @@
           <a:p>
             <a:fld id="{1D8BD707-D9CF-40AE-B4C6-C98DA3205C09}" type="datetimeFigureOut">
               <a:rPr lang="en-US"/>
-              <a:t>9/17/26</a:t>
+              <a:t>9/19/26</a:t>
             </a:fld>
             <a:endParaRPr lang="en-US"/>
           </a:p>
@@ -6207,7 +6207,7 @@
           <a:p>
             <a:fld id="{1D8BD707-D9CF-40AE-B4C6-C98DA3205C09}" type="datetimeFigureOut">
               <a:rPr lang="en-US"/>
-              <a:t>9/17/26</a:t>
+              <a:t>9/19/26</a:t>
             </a:fld>
             <a:endParaRPr lang="en-US"/>
           </a:p>
@@ -6398,7 +6398,7 @@
           <a:p>
             <a:fld id="{1D8BD707-D9CF-40AE-B4C6-C98DA3205C09}" type="datetimeFigureOut">
               <a:rPr lang="en-US"/>
-              <a:t>9/17/26</a:t>
+              <a:t>9/19/26</a:t>
             </a:fld>
             <a:endParaRPr lang="en-US"/>
           </a:p>
@@ -6683,7 +6683,7 @@
           <a:p>
             <a:fld id="{1D8BD707-D9CF-40AE-B4C6-C98DA3205C09}" type="datetimeFigureOut">
               <a:rPr lang="en-US"/>
-              <a:t>9/17/26</a:t>
+              <a:t>9/19/26</a:t>
             </a:fld>
             <a:endParaRPr lang="en-US"/>
           </a:p>
@@ -7066,7 +7066,7 @@
         <p:spPr>
           <a:xfrm>
             <a:off x="4080434" y="2048497"/>
-            <a:ext cx="4180204" cy="2542427"/>
+            <a:ext cx="4180204" cy="10245882"/>
           </a:xfrm>
           <a:prstGeom prst="rect">
             <a:avLst/>
@@ -7096,8 +7096,65 @@
                 <a:latin typeface="Calibri" panose="020F0502020204030204" pitchFamily="34" charset="0"/>
                 <a:cs typeface="Calibri" panose="020F0502020204030204" pitchFamily="34" charset="0"/>
               </a:rPr>
-              <a:t>    Control Statements Loops</a:t>
-            </a:r>
+              <a:t>    Control Statements Loops </a:t>
+            </a:r>
+            <a:r>
+              <a:rPr lang="en-US" sz="5400" dirty="0">
+                <a:solidFill>
+                  <a:srgbClr val="E9F6F3"/>
+                </a:solidFill>
+                <a:highlight>
+                  <a:srgbClr val="000000"/>
+                </a:highlight>
+                <a:latin typeface="Calibri" pitchFamily="34" charset="0"/>
+                <a:ea typeface="Calibri" pitchFamily="34" charset="-122"/>
+                <a:cs typeface="Calibri" pitchFamily="34" charset="-120"/>
+              </a:rPr>
+              <a:t>Multi-dimensional &amp; asymmetric arrays  ·  </a:t>
+            </a:r>
+            <a:r>
+              <a:rPr lang="en-US" sz="5400" dirty="0" err="1">
+                <a:solidFill>
+                  <a:srgbClr val="E9F6F3"/>
+                </a:solidFill>
+                <a:highlight>
+                  <a:srgbClr val="000000"/>
+                </a:highlight>
+                <a:latin typeface="Calibri" pitchFamily="34" charset="0"/>
+                <a:ea typeface="Calibri" pitchFamily="34" charset="-122"/>
+                <a:cs typeface="Calibri" pitchFamily="34" charset="-120"/>
+              </a:rPr>
+              <a:t>ArrayList</a:t>
+            </a:r>
+            <a:r>
+              <a:rPr lang="en-US" sz="5400" dirty="0">
+                <a:solidFill>
+                  <a:srgbClr val="E9F6F3"/>
+                </a:solidFill>
+                <a:highlight>
+                  <a:srgbClr val="000000"/>
+                </a:highlight>
+                <a:latin typeface="Calibri" pitchFamily="34" charset="0"/>
+                <a:ea typeface="Calibri" pitchFamily="34" charset="-122"/>
+                <a:cs typeface="Calibri" pitchFamily="34" charset="-120"/>
+              </a:rPr>
+              <a:t>  ·  do-while  ·  break &amp; continue</a:t>
+            </a:r>
+            <a:endParaRPr lang="en-US" sz="5400" dirty="0">
+              <a:highlight>
+                <a:srgbClr val="000000"/>
+              </a:highlight>
+            </a:endParaRPr>
+          </a:p>
+          <a:p>
+            <a:pPr marL="603250" marR="5080" indent="-591185">
+              <a:lnSpc>
+                <a:spcPct val="103299"/>
+              </a:lnSpc>
+              <a:spcBef>
+                <a:spcPts val="45"/>
+              </a:spcBef>
+            </a:pPr>
             <a:endParaRPr sz="5400" b="1" dirty="0">
               <a:solidFill>
                 <a:schemeClr val="accent5">
@@ -19576,9 +19633,12 @@
 </file>
 
 <file path=customXml/item1.xml><?xml version="1.0" encoding="utf-8"?>
-<p:properties xmlns:p="http://schemas.microsoft.com/office/2006/metadata/properties" xmlns:xsi="http://www.w3.org/2001/XMLSchema-instance" xmlns:pc="http://schemas.microsoft.com/office/infopath/2007/PartnerControls">
-  <documentManagement/>
-</p:properties>
+<?mso-contentType ?>
+<FormTemplates xmlns="http://schemas.microsoft.com/sharepoint/v3/contenttype/forms">
+  <Display>DocumentLibraryForm</Display>
+  <Edit>DocumentLibraryForm</Edit>
+  <New>DocumentLibraryForm</New>
+</FormTemplates>
 </file>
 
 <file path=customXml/item2.xml><?xml version="1.0" encoding="utf-8"?>
@@ -19720,19 +19780,15 @@
 </file>
 
 <file path=customXml/item3.xml><?xml version="1.0" encoding="utf-8"?>
-<?mso-contentType ?>
-<FormTemplates xmlns="http://schemas.microsoft.com/sharepoint/v3/contenttype/forms">
-  <Display>DocumentLibraryForm</Display>
-  <Edit>DocumentLibraryForm</Edit>
-  <New>DocumentLibraryForm</New>
-</FormTemplates>
+<p:properties xmlns:p="http://schemas.microsoft.com/office/2006/metadata/properties" xmlns:xsi="http://www.w3.org/2001/XMLSchema-instance" xmlns:pc="http://schemas.microsoft.com/office/infopath/2007/PartnerControls">
+  <documentManagement/>
+</p:properties>
 </file>
 
 <file path=customXml/itemProps1.xml><?xml version="1.0" encoding="utf-8"?>
-<ds:datastoreItem xmlns:ds="http://schemas.openxmlformats.org/officeDocument/2006/customXml" ds:itemID="{551C73E0-21DE-44C0-AC09-20B6FA27554C}">
+<ds:datastoreItem xmlns:ds="http://schemas.openxmlformats.org/officeDocument/2006/customXml" ds:itemID="{77646C84-701A-4061-B977-6AA8F23187E4}">
   <ds:schemaRefs>
-    <ds:schemaRef ds:uri="http://schemas.microsoft.com/office/2006/metadata/properties"/>
-    <ds:schemaRef ds:uri="http://schemas.microsoft.com/office/infopath/2007/PartnerControls"/>
+    <ds:schemaRef ds:uri="http://schemas.microsoft.com/sharepoint/v3/contenttype/forms"/>
   </ds:schemaRefs>
 </ds:datastoreItem>
 </file>
@@ -19756,9 +19812,10 @@
 </file>
 
 <file path=customXml/itemProps3.xml><?xml version="1.0" encoding="utf-8"?>
-<ds:datastoreItem xmlns:ds="http://schemas.openxmlformats.org/officeDocument/2006/customXml" ds:itemID="{77646C84-701A-4061-B977-6AA8F23187E4}">
+<ds:datastoreItem xmlns:ds="http://schemas.openxmlformats.org/officeDocument/2006/customXml" ds:itemID="{551C73E0-21DE-44C0-AC09-20B6FA27554C}">
   <ds:schemaRefs>
-    <ds:schemaRef ds:uri="http://schemas.microsoft.com/sharepoint/v3/contenttype/forms"/>
+    <ds:schemaRef ds:uri="http://schemas.microsoft.com/office/2006/metadata/properties"/>
+    <ds:schemaRef ds:uri="http://schemas.microsoft.com/office/infopath/2007/PartnerControls"/>
   </ds:schemaRefs>
 </ds:datastoreItem>
 </file>